--- a/slides/07_Making_New_Columns.pptx
+++ b/slides/07_Making_New_Columns.pptx
@@ -130,7 +130,7 @@
   <p:extLst>
     <p:ext uri="{521415D9-36F7-43E2-AB2F-B90AF26B5E84}">
       <p14:sectionLst xmlns:p14="http://schemas.microsoft.com/office/powerpoint/2010/main">
-        <p14:section name="Introduction" id="{58a35f06-3f2b-1b0c-3881-60bd92f06b1b}">
+        <p14:section name="Introduction" id="{3cdc060e-ac09-ac02-f830-66f4547d7c20}">
           <p14:sldIdLst>
             <p14:sldId id="256"/>
             <p14:sldId id="257"/>
@@ -139,7 +139,7 @@
             <p14:sldId id="260"/>
           </p14:sldIdLst>
         </p14:section>
-        <p14:section name="A new notebook" id="{bc38d7f5-2f93-cc73-65e0-8b089fda2e59}">
+        <p14:section name="A new notebook" id="{75d82bfb-e7fd-15fb-05a6-a33e286dee6a}">
           <p14:sldIdLst>
             <p14:sldId id="261"/>
             <p14:sldId id="262"/>
@@ -149,7 +149,7 @@
             <p14:sldId id="266"/>
           </p14:sldIdLst>
         </p14:section>
-        <p14:section name="Calculating a review score" id="{1e3be40e-04b7-d4f8-8a63-8d78d11236f3}">
+        <p14:section name="Calculating a review score" id="{dea8f259-4507-d2cb-9d1c-5d80edd283af}">
           <p14:sldIdLst>
             <p14:sldId id="267"/>
             <p14:sldId id="268"/>
@@ -157,7 +157,7 @@
             <p14:sldId id="270"/>
           </p14:sldIdLst>
         </p14:section>
-        <p14:section name="Years and groups" id="{ab4b7497-a988-190f-99d6-a4a723e573b0}">
+        <p14:section name="Years and groups" id="{1919054a-e5b5-7f63-dce6-f74681a82cbb}">
           <p14:sldIdLst>
             <p14:sldId id="271"/>
             <p14:sldId id="272"/>
@@ -168,7 +168,7 @@
             <p14:sldId id="277"/>
           </p14:sldIdLst>
         </p14:section>
-        <p14:section name="Wrap up" id="{847e6bb9-e79e-dcf2-4642-2956da0b32ea}">
+        <p14:section name="Wrap up" id="{f844aafa-376d-e605-8bda-e6436541f2c4}">
           <p14:sldIdLst>
             <p14:sldId id="278"/>
             <p14:sldId id="279"/>
@@ -3705,7 +3705,7 @@
               <a:t> columns, just like </a:t>
             </a:r>
             <a:r>
-              <a:rPr lang="en-US" sz="1300" dirty="0">
+              <a:rPr lang="en-US" sz="1300" b="1" dirty="0">
                 <a:solidFill>
                   <a:srgbClr val="B86E1E"/>
                 </a:solidFill>
@@ -3836,7 +3836,7 @@
               <a:t>How many rows and columns will </a:t>
             </a:r>
             <a:r>
-              <a:rPr lang="en-US" sz="1300" dirty="0">
+              <a:rPr lang="en-US" sz="1300" b="1" dirty="0">
                 <a:solidFill>
                   <a:srgbClr val="B86E1E"/>
                 </a:solidFill>
@@ -3855,7 +3855,7 @@
               <a:t> have? What data type will </a:t>
             </a:r>
             <a:r>
-              <a:rPr lang="en-US" sz="1300" dirty="0">
+              <a:rPr lang="en-US" sz="1300" b="1" dirty="0">
                 <a:solidFill>
                   <a:srgbClr val="B86E1E"/>
                 </a:solidFill>
@@ -3959,7 +3959,7 @@
               <a:t>Our file is a Parquet file, so we use </a:t>
             </a:r>
             <a:r>
-              <a:rPr lang="en-US" sz="1300" dirty="0">
+              <a:rPr lang="en-US" sz="1300" b="1" dirty="0">
                 <a:solidFill>
                   <a:srgbClr val="B86E1E"/>
                 </a:solidFill>
@@ -3978,7 +3978,7 @@
               <a:t> instead of </a:t>
             </a:r>
             <a:r>
-              <a:rPr lang="en-US" sz="1300" dirty="0">
+              <a:rPr lang="en-US" sz="1300" b="1" dirty="0">
                 <a:solidFill>
                   <a:srgbClr val="B86E1E"/>
                 </a:solidFill>
@@ -3997,7 +3997,7 @@
               <a:t>. We call it </a:t>
             </a:r>
             <a:r>
-              <a:rPr lang="en-US" sz="1300" dirty="0">
+              <a:rPr lang="en-US" sz="1300" b="1" dirty="0">
                 <a:solidFill>
                   <a:srgbClr val="B86E1E"/>
                 </a:solidFill>
@@ -4228,7 +4228,7 @@
               <a:t>​</a:t>
             </a:r>
             <a:r>
-              <a:rPr lang="en-US" sz="1800" dirty="0">
+              <a:rPr lang="en-US" sz="1800" b="1" dirty="0">
                 <a:solidFill>
                   <a:srgbClr val="B86E1E"/>
                 </a:solidFill>
@@ -4247,7 +4247,7 @@
               <a:t> in this notebook is our clean data, but </a:t>
             </a:r>
             <a:r>
-              <a:rPr lang="en-US" sz="1800" dirty="0">
+              <a:rPr lang="en-US" sz="1800" b="1" dirty="0">
                 <a:solidFill>
                   <a:srgbClr val="B86E1E"/>
                 </a:solidFill>
@@ -4266,7 +4266,7 @@
               <a:t> in </a:t>
             </a:r>
             <a:r>
-              <a:rPr lang="en-US" sz="1800" dirty="0">
+              <a:rPr lang="en-US" sz="1800" b="1" dirty="0">
                 <a:solidFill>
                   <a:srgbClr val="B86E1E"/>
                 </a:solidFill>
@@ -4876,7 +4876,7 @@
               <a:t> </a:t>
             </a:r>
             <a:r>
-              <a:rPr lang="en-US" sz="1300" dirty="0">
+              <a:rPr lang="en-US" sz="1300" b="1" dirty="0">
                 <a:solidFill>
                   <a:srgbClr val="B86E1E"/>
                 </a:solidFill>
@@ -4895,7 +4895,7 @@
               <a:t> divided by the total reviews, times 100, rounded to 1 decimal place. </a:t>
             </a:r>
             <a:r>
-              <a:rPr lang="en-US" sz="1300" dirty="0">
+              <a:rPr lang="en-US" sz="1300" b="1" dirty="0">
                 <a:solidFill>
                   <a:srgbClr val="B86E1E"/>
                 </a:solidFill>
@@ -5376,7 +5376,7 @@
               <a:t>Without </a:t>
             </a:r>
             <a:r>
-              <a:rPr lang="en-US" sz="1800" dirty="0">
+              <a:rPr lang="en-US" sz="1800" b="1" dirty="0">
                 <a:solidFill>
                   <a:srgbClr val="B86E1E"/>
                 </a:solidFill>
@@ -5395,7 +5395,7 @@
               <a:t>, the new column would take the name of the first column in the calculation, </a:t>
             </a:r>
             <a:r>
-              <a:rPr lang="en-US" sz="1800" dirty="0">
+              <a:rPr lang="en-US" sz="1800" b="1" dirty="0">
                 <a:solidFill>
                   <a:srgbClr val="B86E1E"/>
                 </a:solidFill>
@@ -5414,7 +5414,7 @@
               <a:t>, and replace it. </a:t>
             </a:r>
             <a:r>
-              <a:rPr lang="en-US" sz="1800" dirty="0">
+              <a:rPr lang="en-US" sz="1800" b="1" dirty="0">
                 <a:solidFill>
                   <a:srgbClr val="B86E1E"/>
                 </a:solidFill>
@@ -5620,7 +5620,7 @@
               <a:t> that labels every game </a:t>
             </a:r>
             <a:r>
-              <a:rPr lang="en-US" sz="1600" dirty="0">
+              <a:rPr lang="en-US" sz="1600" b="1" dirty="0">
                 <a:solidFill>
                   <a:srgbClr val="E8A55A"/>
                 </a:solidFill>
@@ -5639,7 +5639,7 @@
               <a:t> or </a:t>
             </a:r>
             <a:r>
-              <a:rPr lang="en-US" sz="1600" dirty="0">
+              <a:rPr lang="en-US" sz="1600" b="1" dirty="0">
                 <a:solidFill>
                   <a:srgbClr val="E8A55A"/>
                 </a:solidFill>
@@ -5941,7 +5941,7 @@
               <a:t>we use </a:t>
             </a:r>
             <a:r>
-              <a:rPr lang="en-US" sz="1300" dirty="0">
+              <a:rPr lang="en-US" sz="1300" b="1" dirty="0">
                 <a:solidFill>
                   <a:srgbClr val="B86E1E"/>
                 </a:solidFill>
@@ -6075,7 +6075,7 @@
               <a:t>the </a:t>
             </a:r>
             <a:r>
-              <a:rPr lang="en-US" sz="1300" dirty="0">
+              <a:rPr lang="en-US" sz="1300" b="1" dirty="0">
                 <a:solidFill>
                   <a:srgbClr val="B86E1E"/>
                 </a:solidFill>
@@ -6094,7 +6094,7 @@
               <a:t> column holds text like </a:t>
             </a:r>
             <a:r>
-              <a:rPr lang="en-US" sz="1300" dirty="0">
+              <a:rPr lang="en-US" sz="1300" b="1" dirty="0">
                 <a:solidFill>
                   <a:srgbClr val="B86E1E"/>
                 </a:solidFill>
@@ -6131,7 +6131,7 @@
               <a:t>a game is Indie if that text contains </a:t>
             </a:r>
             <a:r>
-              <a:rPr lang="en-US" sz="1300" dirty="0">
+              <a:rPr lang="en-US" sz="1300" b="1" dirty="0">
                 <a:solidFill>
                   <a:srgbClr val="B86E1E"/>
                 </a:solidFill>
@@ -6168,7 +6168,7 @@
               <a:t>we use </a:t>
             </a:r>
             <a:r>
-              <a:rPr lang="en-US" sz="1300" dirty="0">
+              <a:rPr lang="en-US" sz="1300" b="1" dirty="0">
                 <a:solidFill>
                   <a:srgbClr val="B86E1E"/>
                 </a:solidFill>
@@ -6928,7 +6928,7 @@
               <a:t> We add the year and group to the same </a:t>
             </a:r>
             <a:r>
-              <a:rPr lang="en-US" sz="1300" dirty="0">
+              <a:rPr lang="en-US" sz="1300" b="1" dirty="0">
                 <a:solidFill>
                   <a:srgbClr val="B86E1E"/>
                 </a:solidFill>
@@ -7113,7 +7113,7 @@
               <a:t> → gets the year from each </a:t>
             </a:r>
             <a:r>
-              <a:rPr lang="en-US" sz="1500" dirty="0">
+              <a:rPr lang="en-US" sz="1500" b="1" dirty="0">
                 <a:solidFill>
                   <a:srgbClr val="B86E1E"/>
                 </a:solidFill>
@@ -7132,7 +7132,7 @@
               <a:t> with </a:t>
             </a:r>
             <a:r>
-              <a:rPr lang="en-US" sz="1500" dirty="0">
+              <a:rPr lang="en-US" sz="1500" b="1" dirty="0">
                 <a:solidFill>
                   <a:srgbClr val="B86E1E"/>
                 </a:solidFill>
@@ -7151,7 +7151,7 @@
               <a:t>, named </a:t>
             </a:r>
             <a:r>
-              <a:rPr lang="en-US" sz="1500" dirty="0">
+              <a:rPr lang="en-US" sz="1500" b="1" dirty="0">
                 <a:solidFill>
                   <a:srgbClr val="B86E1E"/>
                 </a:solidFill>
@@ -7196,7 +7196,7 @@
               <a:t> → </a:t>
             </a:r>
             <a:r>
-              <a:rPr lang="en-US" sz="1500" dirty="0">
+              <a:rPr lang="en-US" sz="1500" b="1" dirty="0">
                 <a:solidFill>
                   <a:srgbClr val="B86E1E"/>
                 </a:solidFill>
@@ -7215,7 +7215,7 @@
               <a:t> works like </a:t>
             </a:r>
             <a:r>
-              <a:rPr lang="en-US" sz="1500" dirty="0">
+              <a:rPr lang="en-US" sz="1500" b="1" dirty="0">
                 <a:solidFill>
                   <a:srgbClr val="B86E1E"/>
                 </a:solidFill>
@@ -7234,7 +7234,7 @@
               <a:t>: does </a:t>
             </a:r>
             <a:r>
-              <a:rPr lang="en-US" sz="1500" dirty="0">
+              <a:rPr lang="en-US" sz="1500" b="1" dirty="0">
                 <a:solidFill>
                   <a:srgbClr val="B86E1E"/>
                 </a:solidFill>
@@ -7253,7 +7253,7 @@
               <a:t> contain </a:t>
             </a:r>
             <a:r>
-              <a:rPr lang="en-US" sz="1500" dirty="0">
+              <a:rPr lang="en-US" sz="1500" b="1" dirty="0">
                 <a:solidFill>
                   <a:srgbClr val="B86E1E"/>
                 </a:solidFill>
@@ -7306,7 +7306,7 @@
               <a:t> → if it does, the value is </a:t>
             </a:r>
             <a:r>
-              <a:rPr lang="en-US" sz="1500" dirty="0">
+              <a:rPr lang="en-US" sz="1500" b="1" dirty="0">
                 <a:solidFill>
                   <a:srgbClr val="B86E1E"/>
                 </a:solidFill>
@@ -7367,7 +7367,7 @@
               <a:t> → otherwise, </a:t>
             </a:r>
             <a:r>
-              <a:rPr lang="en-US" sz="1500" dirty="0">
+              <a:rPr lang="en-US" sz="1500" b="1" dirty="0">
                 <a:solidFill>
                   <a:srgbClr val="B86E1E"/>
                 </a:solidFill>
@@ -7386,7 +7386,7 @@
               <a:t>, like </a:t>
             </a:r>
             <a:r>
-              <a:rPr lang="en-US" sz="1500" dirty="0">
+              <a:rPr lang="en-US" sz="1500" b="1" dirty="0">
                 <a:solidFill>
                   <a:srgbClr val="B86E1E"/>
                 </a:solidFill>
@@ -7439,7 +7439,7 @@
               <a:t> → names the column </a:t>
             </a:r>
             <a:r>
-              <a:rPr lang="en-US" sz="1500" dirty="0">
+              <a:rPr lang="en-US" sz="1500" b="1" dirty="0">
                 <a:solidFill>
                   <a:srgbClr val="B86E1E"/>
                 </a:solidFill>
@@ -7773,7 +7773,7 @@
               <a:t>how to sort games into groups with </a:t>
             </a:r>
             <a:r>
-              <a:rPr lang="en-US" sz="1800" dirty="0">
+              <a:rPr lang="en-US" sz="1800" b="1" dirty="0">
                 <a:solidFill>
                   <a:srgbClr val="B86E1E"/>
                 </a:solidFill>
@@ -8006,7 +8006,7 @@
               <a:t>Add a column called </a:t>
             </a:r>
             <a:r>
-              <a:rPr lang="en-US" sz="1800" dirty="0">
+              <a:rPr lang="en-US" sz="1800" b="1" dirty="0">
                 <a:solidFill>
                   <a:srgbClr val="B86E1E"/>
                 </a:solidFill>
@@ -8025,7 +8025,7 @@
               <a:t> that is </a:t>
             </a:r>
             <a:r>
-              <a:rPr lang="en-US" sz="1800" dirty="0">
+              <a:rPr lang="en-US" sz="1800" b="1" dirty="0">
                 <a:solidFill>
                   <a:srgbClr val="B86E1E"/>
                 </a:solidFill>
@@ -8044,7 +8044,7 @@
               <a:t> when </a:t>
             </a:r>
             <a:r>
-              <a:rPr lang="en-US" sz="1800" dirty="0">
+              <a:rPr lang="en-US" sz="1800" b="1" dirty="0">
                 <a:solidFill>
                   <a:srgbClr val="B86E1E"/>
                 </a:solidFill>
@@ -8090,7 +8090,7 @@
               <a:t>Hint: we don't need </a:t>
             </a:r>
             <a:r>
-              <a:rPr lang="en-US" sz="1800" dirty="0">
+              <a:rPr lang="en-US" sz="1800" b="1" dirty="0">
                 <a:solidFill>
                   <a:srgbClr val="B86E1E"/>
                 </a:solidFill>
@@ -8109,7 +8109,7 @@
               <a:t>, because a comparison already gives </a:t>
             </a:r>
             <a:r>
-              <a:rPr lang="en-US" sz="1800" dirty="0">
+              <a:rPr lang="en-US" sz="1800" b="1" dirty="0">
                 <a:solidFill>
                   <a:srgbClr val="B86E1E"/>
                 </a:solidFill>
@@ -8128,7 +8128,7 @@
               <a:t> or </a:t>
             </a:r>
             <a:r>
-              <a:rPr lang="en-US" sz="1800" dirty="0">
+              <a:rPr lang="en-US" sz="1800" b="1" dirty="0">
                 <a:solidFill>
                   <a:srgbClr val="B86E1E"/>
                 </a:solidFill>
@@ -8329,7 +8329,7 @@
               <a:t>every game now has a </a:t>
             </a:r>
             <a:r>
-              <a:rPr lang="en-US" sz="1300" dirty="0">
+              <a:rPr lang="en-US" sz="1300" b="1" dirty="0">
                 <a:solidFill>
                   <a:srgbClr val="B86E1E"/>
                 </a:solidFill>
@@ -8348,7 +8348,7 @@
               <a:t> and a </a:t>
             </a:r>
             <a:r>
-              <a:rPr lang="en-US" sz="1300" dirty="0">
+              <a:rPr lang="en-US" sz="1300" b="1" dirty="0">
                 <a:solidFill>
                   <a:srgbClr val="B86E1E"/>
                 </a:solidFill>
@@ -8385,7 +8385,7 @@
               <a:t>games with </a:t>
             </a:r>
             <a:r>
-              <a:rPr lang="en-US" sz="1300" dirty="0">
+              <a:rPr lang="en-US" sz="1300" b="1" dirty="0">
                 <a:solidFill>
                   <a:srgbClr val="B86E1E"/>
                 </a:solidFill>
@@ -8404,7 +8404,7 @@
               <a:t> in their genres → </a:t>
             </a:r>
             <a:r>
-              <a:rPr lang="en-US" sz="1300" dirty="0">
+              <a:rPr lang="en-US" sz="1300" b="1" dirty="0">
                 <a:solidFill>
                   <a:srgbClr val="B86E1E"/>
                 </a:solidFill>
@@ -8449,7 +8449,7 @@
               <a:t>every other game → </a:t>
             </a:r>
             <a:r>
-              <a:rPr lang="en-US" sz="1300" dirty="0">
+              <a:rPr lang="en-US" sz="1300" b="1" dirty="0">
                 <a:solidFill>
                   <a:srgbClr val="B86E1E"/>
                 </a:solidFill>
@@ -8680,7 +8680,7 @@
               <a:t>We could have made a </a:t>
             </a:r>
             <a:r>
-              <a:rPr lang="en-US" sz="1800" dirty="0">
+              <a:rPr lang="en-US" sz="1800" b="1" dirty="0">
                 <a:solidFill>
                   <a:srgbClr val="B86E1E"/>
                 </a:solidFill>
@@ -8699,7 +8699,7 @@
               <a:t>/</a:t>
             </a:r>
             <a:r>
-              <a:rPr lang="en-US" sz="1800" dirty="0">
+              <a:rPr lang="en-US" sz="1800" b="1" dirty="0">
                 <a:solidFill>
                   <a:srgbClr val="B86E1E"/>
                 </a:solidFill>
@@ -8718,7 +8718,7 @@
               <a:t> column instead. A text label like </a:t>
             </a:r>
             <a:r>
-              <a:rPr lang="en-US" sz="1800" dirty="0">
+              <a:rPr lang="en-US" sz="1800" b="1" dirty="0">
                 <a:solidFill>
                   <a:srgbClr val="B86E1E"/>
                 </a:solidFill>
@@ -8737,7 +8737,7 @@
               <a:t> or </a:t>
             </a:r>
             <a:r>
-              <a:rPr lang="en-US" sz="1800" dirty="0">
+              <a:rPr lang="en-US" sz="1800" b="1" dirty="0">
                 <a:solidFill>
                   <a:srgbClr val="B86E1E"/>
                 </a:solidFill>
@@ -8940,7 +8940,7 @@
               <a:t>Why do we use </a:t>
             </a:r>
             <a:r>
-              <a:rPr lang="en-US" sz="1800" dirty="0">
+              <a:rPr lang="en-US" sz="1800" b="1" dirty="0">
                 <a:solidFill>
                   <a:srgbClr val="E8A55A"/>
                 </a:solidFill>
@@ -8986,7 +8986,7 @@
               <a:t>What happens if we leave out </a:t>
             </a:r>
             <a:r>
-              <a:rPr lang="en-US" sz="1800" dirty="0">
+              <a:rPr lang="en-US" sz="1800" b="1" dirty="0">
                 <a:solidFill>
                   <a:srgbClr val="E8A55A"/>
                 </a:solidFill>
@@ -9032,7 +9032,7 @@
               <a:t>What does </a:t>
             </a:r>
             <a:r>
-              <a:rPr lang="en-US" sz="1800" dirty="0">
+              <a:rPr lang="en-US" sz="1800" b="1" dirty="0">
                 <a:solidFill>
                   <a:srgbClr val="E8A55A"/>
                 </a:solidFill>
@@ -9341,7 +9341,7 @@
               <a:t>Add it to the </a:t>
             </a:r>
             <a:r>
-              <a:rPr lang="en-US" sz="1400" dirty="0">
+              <a:rPr lang="en-US" sz="1400" b="1" dirty="0">
                 <a:solidFill>
                   <a:srgbClr val="B86E1E"/>
                 </a:solidFill>
@@ -9387,7 +9387,7 @@
               <a:t>If your question compares groups, write a </a:t>
             </a:r>
             <a:r>
-              <a:rPr lang="en-US" sz="1400" dirty="0">
+              <a:rPr lang="en-US" sz="1400" b="1" dirty="0">
                 <a:solidFill>
                   <a:srgbClr val="B86E1E"/>
                 </a:solidFill>
@@ -9635,7 +9635,7 @@
               <a:t> – a value written straight into our code, such as </a:t>
             </a:r>
             <a:r>
-              <a:rPr lang="en-US" sz="1800" dirty="0">
+              <a:rPr lang="en-US" sz="1800" b="1" dirty="0">
                 <a:solidFill>
                   <a:srgbClr val="B86E1E"/>
                 </a:solidFill>
@@ -10485,7 +10485,7 @@
               <a:t>From now on we'll work in </a:t>
             </a:r>
             <a:r>
-              <a:rPr lang="en-US" sz="1600" dirty="0">
+              <a:rPr lang="en-US" sz="1600" b="1" dirty="0">
                 <a:solidFill>
                   <a:srgbClr val="E8A55A"/>
                 </a:solidFill>
@@ -11029,7 +11029,7 @@
               <a:t>Type </a:t>
             </a:r>
             <a:r>
-              <a:rPr lang="en-US" sz="1500" dirty="0">
+              <a:rPr lang="en-US" sz="1500" b="1" dirty="0">
                 <a:solidFill>
                   <a:srgbClr val="B86E1E"/>
                 </a:solidFill>
@@ -11064,7 +11064,7 @@
               <a:t>. The terminal shows the </a:t>
             </a:r>
             <a:r>
-              <a:rPr lang="en-US" sz="1500" dirty="0">
+              <a:rPr lang="en-US" sz="1500" b="1" dirty="0">
                 <a:solidFill>
                   <a:srgbClr val="B86E1E"/>
                 </a:solidFill>
@@ -11110,7 +11110,7 @@
               <a:t>Type </a:t>
             </a:r>
             <a:r>
-              <a:rPr lang="en-US" sz="1500" dirty="0">
+              <a:rPr lang="en-US" sz="1500" b="1" dirty="0">
                 <a:solidFill>
                   <a:srgbClr val="B86E1E"/>
                 </a:solidFill>
